--- a/02 Osnove Informacione Bezbednosti/02 Prezentacije/PPTX/02_Autorizacija_nad_resursom_i_klasifikacija_podataka.pptx
+++ b/02 Osnove Informacione Bezbednosti/02 Prezentacije/PPTX/02_Autorizacija_nad_resursom_i_klasifikacija_podataka.pptx
@@ -7277,7 +7277,7 @@
         <p:spPr>
           <a:xfrm xmlns:a="http://schemas.openxmlformats.org/drawingml/2006/main">
             <a:off x="666750" y="2095500"/>
-            <a:ext cx="6858000" cy="2276475"/>
+            <a:ext cx="6858000" cy="2812550"/>
           </a:xfrm>
           <a:prstGeom xmlns:a="http://schemas.openxmlformats.org/drawingml/2006/main" prst="roundRect">
             <a:avLst>
@@ -7459,7 +7459,7 @@
           <a:p xmlns:a="http://schemas.openxmlformats.org/drawingml/2006/main">
             <a:pPr algn="r">
               <a:lnSpc>
-                <a:spcPct val="100000"/>
+                <a:spcPts val="1300"/>
               </a:lnSpc>
               <a:buNone/>
               <a:defRPr sz="975" b="0">
@@ -7486,7 +7486,7 @@
           <a:p xmlns:a="http://schemas.openxmlformats.org/drawingml/2006/main">
             <a:pPr algn="r">
               <a:lnSpc>
-                <a:spcPct val="100000"/>
+                <a:spcPts val="1300"/>
               </a:lnSpc>
               <a:buNone/>
               <a:defRPr sz="975" b="0">
@@ -7513,7 +7513,7 @@
           <a:p xmlns:a="http://schemas.openxmlformats.org/drawingml/2006/main">
             <a:pPr algn="r">
               <a:lnSpc>
-                <a:spcPct val="100000"/>
+                <a:spcPts val="1300"/>
               </a:lnSpc>
               <a:buNone/>
               <a:defRPr sz="975" b="0">
@@ -7540,7 +7540,7 @@
           <a:p xmlns:a="http://schemas.openxmlformats.org/drawingml/2006/main">
             <a:pPr algn="r">
               <a:lnSpc>
-                <a:spcPct val="100000"/>
+                <a:spcPts val="1300"/>
               </a:lnSpc>
               <a:buNone/>
               <a:defRPr sz="975" b="0">
@@ -7567,7 +7567,7 @@
           <a:p xmlns:a="http://schemas.openxmlformats.org/drawingml/2006/main">
             <a:pPr algn="r">
               <a:lnSpc>
-                <a:spcPct val="100000"/>
+                <a:spcPts val="1300"/>
               </a:lnSpc>
               <a:buNone/>
               <a:defRPr sz="975" b="0">
@@ -7594,7 +7594,7 @@
           <a:p xmlns:a="http://schemas.openxmlformats.org/drawingml/2006/main">
             <a:pPr algn="r">
               <a:lnSpc>
-                <a:spcPct val="100000"/>
+                <a:spcPts val="1300"/>
               </a:lnSpc>
               <a:buNone/>
               <a:defRPr sz="975" b="0">
@@ -7621,7 +7621,7 @@
           <a:p xmlns:a="http://schemas.openxmlformats.org/drawingml/2006/main">
             <a:pPr algn="r">
               <a:lnSpc>
-                <a:spcPct val="100000"/>
+                <a:spcPts val="1300"/>
               </a:lnSpc>
               <a:buNone/>
               <a:defRPr sz="975" b="0">
@@ -7648,7 +7648,7 @@
           <a:p xmlns:a="http://schemas.openxmlformats.org/drawingml/2006/main">
             <a:pPr algn="r">
               <a:lnSpc>
-                <a:spcPct val="100000"/>
+                <a:spcPts val="1300"/>
               </a:lnSpc>
               <a:buNone/>
               <a:defRPr sz="975" b="0">
@@ -7675,7 +7675,7 @@
           <a:p xmlns:a="http://schemas.openxmlformats.org/drawingml/2006/main">
             <a:pPr algn="r">
               <a:lnSpc>
-                <a:spcPct val="100000"/>
+                <a:spcPts val="1300"/>
               </a:lnSpc>
               <a:buNone/>
               <a:defRPr sz="975" b="0">
@@ -7702,7 +7702,7 @@
           <a:p xmlns:a="http://schemas.openxmlformats.org/drawingml/2006/main">
             <a:pPr algn="r">
               <a:lnSpc>
-                <a:spcPct val="100000"/>
+                <a:spcPts val="1300"/>
               </a:lnSpc>
               <a:buNone/>
               <a:defRPr sz="975" b="0">
@@ -7726,6 +7726,87 @@
               <a:t>10</a:t>
             </a:r>
           </a:p>
+          <a:p xmlns:a="http://schemas.openxmlformats.org/drawingml/2006/main">
+            <a:pPr algn="r">
+              <a:lnSpc>
+                <a:spcPts val="1300"/>
+              </a:lnSpc>
+              <a:buNone/>
+              <a:defRPr sz="975" b="0">
+                <a:solidFill>
+                  <a:srgbClr val="8792A6"/>
+                </a:solidFill>
+                <a:latin typeface="Consolas"/>
+                <a:ea typeface="Consolas"/>
+                <a:cs typeface="Consolas"/>
+              </a:defRPr>
+            </a:pPr>
+            <a:r>
+              <a:rPr sz="975" b="0">
+                <a:solidFill>
+                  <a:srgbClr val="8792A6"/>
+                </a:solidFill>
+                <a:latin typeface="Consolas"/>
+                <a:ea typeface="Consolas"/>
+                <a:cs typeface="Consolas"/>
+              </a:rPr>
+              <a:t>11</a:t>
+            </a:r>
+          </a:p>
+          <a:p xmlns:a="http://schemas.openxmlformats.org/drawingml/2006/main">
+            <a:pPr algn="r">
+              <a:lnSpc>
+                <a:spcPts val="1300"/>
+              </a:lnSpc>
+              <a:buNone/>
+              <a:defRPr sz="975" b="0">
+                <a:solidFill>
+                  <a:srgbClr val="8792A6"/>
+                </a:solidFill>
+                <a:latin typeface="Consolas"/>
+                <a:ea typeface="Consolas"/>
+                <a:cs typeface="Consolas"/>
+              </a:defRPr>
+            </a:pPr>
+            <a:r>
+              <a:rPr sz="975" b="0">
+                <a:solidFill>
+                  <a:srgbClr val="8792A6"/>
+                </a:solidFill>
+                <a:latin typeface="Consolas"/>
+                <a:ea typeface="Consolas"/>
+                <a:cs typeface="Consolas"/>
+              </a:rPr>
+              <a:t>12</a:t>
+            </a:r>
+          </a:p>
+          <a:p xmlns:a="http://schemas.openxmlformats.org/drawingml/2006/main">
+            <a:pPr algn="r">
+              <a:lnSpc>
+                <a:spcPts val="1300"/>
+              </a:lnSpc>
+              <a:buNone/>
+              <a:defRPr sz="975" b="0">
+                <a:solidFill>
+                  <a:srgbClr val="8792A6"/>
+                </a:solidFill>
+                <a:latin typeface="Consolas"/>
+                <a:ea typeface="Consolas"/>
+                <a:cs typeface="Consolas"/>
+              </a:defRPr>
+            </a:pPr>
+            <a:r>
+              <a:rPr sz="975" b="0">
+                <a:solidFill>
+                  <a:srgbClr val="8792A6"/>
+                </a:solidFill>
+                <a:latin typeface="Consolas"/>
+                <a:ea typeface="Consolas"/>
+                <a:cs typeface="Consolas"/>
+              </a:rPr>
+              <a:t>13</a:t>
+            </a:r>
+          </a:p>
         </p:txBody>
       </p:sp>
       <p:sp>
@@ -7762,6 +7843,9 @@
           <a:lstStyle xmlns:a="http://schemas.openxmlformats.org/drawingml/2006/main"/>
           <a:p xmlns:a="http://schemas.openxmlformats.org/drawingml/2006/main">
             <a:pPr>
+              <a:lnSpc>
+                <a:spcPts val="1300"/>
+              </a:lnSpc>
               <a:buNone/>
               <a:defRPr sz="1050">
                 <a:solidFill>
@@ -7794,7 +7878,7 @@
                   <a:srgbClr val="7651D4"/>
                 </a:solidFill>
               </a:rPr>
-              <a:t>Result</a:t>
+              <a:t>ResourceAccessDecision</a:t>
             </a:r>
             <a:r>
               <a:rPr b="0">
@@ -7802,7 +7886,7 @@
                   <a:srgbClr val="263044"/>
                 </a:solidFill>
               </a:rPr>
-              <a:t>&lt;</a:t>
+              <a:t> </a:t>
             </a:r>
             <a:r>
               <a:rPr b="0">
@@ -7810,7 +7894,7 @@
                   <a:srgbClr val="7651D4"/>
                 </a:solidFill>
               </a:rPr>
-              <a:t>RecordDto</a:t>
+              <a:t>Decide</a:t>
             </a:r>
             <a:r>
               <a:rPr b="0">
@@ -7818,75 +7902,14 @@
                   <a:srgbClr val="263044"/>
                 </a:solidFill>
               </a:rPr>
-              <a:t>&gt; </a:t>
-            </a:r>
-            <a:r>
-              <a:rPr b="0">
-                <a:solidFill>
-                  <a:srgbClr val="7651D4"/>
-                </a:solidFill>
-              </a:rPr>
-              <a:t>Read</a:t>
-            </a:r>
-            <a:r>
-              <a:rPr b="0">
-                <a:solidFill>
-                  <a:srgbClr val="263044"/>
-                </a:solidFill>
-              </a:rPr>
               <a:t>(</a:t>
             </a:r>
-            <a:r>
-              <a:rPr b="0">
-                <a:solidFill>
-                  <a:srgbClr val="7651D4"/>
-                </a:solidFill>
-              </a:rPr>
-              <a:t>UserContext</a:t>
-            </a:r>
-            <a:r>
-              <a:rPr b="0">
-                <a:solidFill>
-                  <a:srgbClr val="263044"/>
-                </a:solidFill>
-              </a:rPr>
-              <a:t> user, </a:t>
-            </a:r>
-            <a:r>
-              <a:rPr b="0">
-                <a:solidFill>
-                  <a:srgbClr val="7651D4"/>
-                </a:solidFill>
-              </a:rPr>
-              <a:t>Record</a:t>
-            </a:r>
-            <a:r>
-              <a:rPr b="0">
-                <a:solidFill>
-                  <a:srgbClr val="263044"/>
-                </a:solidFill>
-              </a:rPr>
-              <a:t> </a:t>
-            </a:r>
-            <a:r>
-              <a:rPr b="1">
-                <a:solidFill>
-                  <a:srgbClr val="0969C3"/>
-                </a:solidFill>
-              </a:rPr>
-              <a:t>record</a:t>
-            </a:r>
-            <a:r>
-              <a:rPr b="0">
-                <a:solidFill>
-                  <a:srgbClr val="263044"/>
-                </a:solidFill>
-              </a:rPr>
-              <a:t>)</a:t>
-            </a:r>
           </a:p>
           <a:p xmlns:a="http://schemas.openxmlformats.org/drawingml/2006/main">
             <a:pPr>
+              <a:lnSpc>
+                <a:spcPts val="1300"/>
+              </a:lnSpc>
               <a:buNone/>
               <a:defRPr sz="1050">
                 <a:solidFill>
@@ -7903,11 +7926,46 @@
                   <a:srgbClr val="263044"/>
                 </a:solidFill>
               </a:rPr>
-              <a:t>{</a:t>
+              <a:t>    </a:t>
+            </a:r>
+            <a:r>
+              <a:rPr b="0">
+                <a:solidFill>
+                  <a:srgbClr val="7651D4"/>
+                </a:solidFill>
+              </a:rPr>
+              <a:t>Requester</a:t>
+            </a:r>
+            <a:r>
+              <a:rPr b="0">
+                <a:solidFill>
+                  <a:srgbClr val="263044"/>
+                </a:solidFill>
+              </a:rPr>
+              <a:t> requester, </a:t>
+            </a:r>
+            <a:r>
+              <a:rPr b="0">
+                <a:solidFill>
+                  <a:srgbClr val="7651D4"/>
+                </a:solidFill>
+              </a:rPr>
+              <a:t>ProtectedResource</a:t>
+            </a:r>
+            <a:r>
+              <a:rPr b="0">
+                <a:solidFill>
+                  <a:srgbClr val="263044"/>
+                </a:solidFill>
+              </a:rPr>
+              <a:t> resource)</a:t>
             </a:r>
           </a:p>
           <a:p xmlns:a="http://schemas.openxmlformats.org/drawingml/2006/main">
             <a:pPr>
+              <a:lnSpc>
+                <a:spcPts val="1300"/>
+              </a:lnSpc>
               <a:buNone/>
               <a:defRPr sz="1050">
                 <a:solidFill>
@@ -7924,107 +7982,14 @@
                   <a:srgbClr val="263044"/>
                 </a:solidFill>
               </a:rPr>
-              <a:t>    </a:t>
-            </a:r>
-            <a:r>
-              <a:rPr b="1">
-                <a:solidFill>
-                  <a:srgbClr val="0969C3"/>
-                </a:solidFill>
-              </a:rPr>
-              <a:t>if</a:t>
-            </a:r>
-            <a:r>
-              <a:rPr b="0">
-                <a:solidFill>
-                  <a:srgbClr val="263044"/>
-                </a:solidFill>
-              </a:rPr>
-              <a:t> (!user.</a:t>
-            </a:r>
-            <a:r>
-              <a:rPr b="0">
-                <a:solidFill>
-                  <a:srgbClr val="7651D4"/>
-                </a:solidFill>
-              </a:rPr>
-              <a:t>Can</a:t>
-            </a:r>
-            <a:r>
-              <a:rPr b="0">
-                <a:solidFill>
-                  <a:srgbClr val="263044"/>
-                </a:solidFill>
-              </a:rPr>
-              <a:t>(</a:t>
-            </a:r>
-            <a:r>
-              <a:rPr b="0">
-                <a:solidFill>
-                  <a:srgbClr val="B45309"/>
-                </a:solidFill>
-              </a:rPr>
-              <a:t>"record.read"</a:t>
-            </a:r>
-            <a:r>
-              <a:rPr b="0">
-                <a:solidFill>
-                  <a:srgbClr val="263044"/>
-                </a:solidFill>
-              </a:rPr>
-              <a:t>)) </a:t>
-            </a:r>
-            <a:r>
-              <a:rPr b="1">
-                <a:solidFill>
-                  <a:srgbClr val="0969C3"/>
-                </a:solidFill>
-              </a:rPr>
-              <a:t>return</a:t>
-            </a:r>
-            <a:r>
-              <a:rPr b="0">
-                <a:solidFill>
-                  <a:srgbClr val="263044"/>
-                </a:solidFill>
-              </a:rPr>
-              <a:t> </a:t>
-            </a:r>
-            <a:r>
-              <a:rPr b="0">
-                <a:solidFill>
-                  <a:srgbClr val="7651D4"/>
-                </a:solidFill>
-              </a:rPr>
-              <a:t>Result</a:t>
-            </a:r>
-            <a:r>
-              <a:rPr b="0">
-                <a:solidFill>
-                  <a:srgbClr val="263044"/>
-                </a:solidFill>
-              </a:rPr>
-              <a:t>.</a:t>
-            </a:r>
-            <a:r>
-              <a:rPr b="0">
-                <a:solidFill>
-                  <a:srgbClr val="7651D4"/>
-                </a:solidFill>
-              </a:rPr>
-              <a:t>Forbidden</a:t>
-            </a:r>
-            <a:r>
-              <a:rPr b="0">
-                <a:solidFill>
-                  <a:srgbClr val="263044"/>
-                </a:solidFill>
-              </a:rPr>
-              <a:t>();</a:t>
+              <a:t>{</a:t>
             </a:r>
           </a:p>
           <a:p xmlns:a="http://schemas.openxmlformats.org/drawingml/2006/main">
             <a:pPr>
+              <a:lnSpc>
+                <a:spcPts val="1300"/>
+              </a:lnSpc>
               <a:buNone/>
               <a:defRPr sz="1050">
                 <a:solidFill>
@@ -8049,7 +8014,7 @@
                   <a:srgbClr val="0969C3"/>
                 </a:solidFill>
               </a:rPr>
-              <a:t>var</a:t>
+              <a:t>if</a:t>
             </a:r>
             <a:r>
               <a:rPr b="0">
@@ -8057,19 +8022,19 @@
                   <a:srgbClr val="263044"/>
                 </a:solidFill>
               </a:rPr>
-              <a:t> ownsRecord = </a:t>
-            </a:r>
-            <a:r>
-              <a:rPr b="1">
-                <a:solidFill>
-                  <a:srgbClr val="0969C3"/>
-                </a:solidFill>
-              </a:rPr>
-              <a:t>record</a:t>
+              <a:t> (!requester.</a:t>
             </a:r>
             <a:r>
               <a:rPr b="0">
                 <a:solidFill>
+                  <a:srgbClr val="7651D4"/>
+                </a:solidFill>
+              </a:rPr>
+              <a:t>Permissions</a:t>
+            </a:r>
+            <a:r>
+              <a:rPr b="0">
+                <a:solidFill>
                   <a:srgbClr val="263044"/>
                 </a:solidFill>
               </a:rPr>
@@ -8081,7 +8046,7 @@
                   <a:srgbClr val="7651D4"/>
                 </a:solidFill>
               </a:rPr>
-              <a:t>OwnerId</a:t>
+              <a:t>Contains</a:t>
             </a:r>
             <a:r>
               <a:rPr b="0">
@@ -8089,7 +8054,7 @@
                   <a:srgbClr val="263044"/>
                 </a:solidFill>
               </a:rPr>
-              <a:t> == user.</a:t>
+              <a:t>(</a:t>
             </a:r>
             <a:r>
               <a:rPr b="0">
@@ -8097,7 +8062,7 @@
                   <a:srgbClr val="7651D4"/>
                 </a:solidFill>
               </a:rPr>
-              <a:t>Id</a:t>
+              <a:t>Permissions</a:t>
             </a:r>
             <a:r>
               <a:rPr b="0">
@@ -8105,11 +8070,30 @@
                   <a:srgbClr val="263044"/>
                 </a:solidFill>
               </a:rPr>
-              <a:t>;</a:t>
+              <a:t>.</a:t>
+            </a:r>
+            <a:r>
+              <a:rPr b="0">
+                <a:solidFill>
+                  <a:srgbClr val="7651D4"/>
+                </a:solidFill>
+              </a:rPr>
+              <a:t>ReadRecords</a:t>
+            </a:r>
+            <a:r>
+              <a:rPr b="0">
+                <a:solidFill>
+                  <a:srgbClr val="263044"/>
+                </a:solidFill>
+              </a:rPr>
+              <a:t>))</a:t>
             </a:r>
           </a:p>
           <a:p xmlns:a="http://schemas.openxmlformats.org/drawingml/2006/main">
             <a:pPr>
+              <a:lnSpc>
+                <a:spcPts val="1300"/>
+              </a:lnSpc>
               <a:buNone/>
               <a:defRPr sz="1050">
                 <a:solidFill>
@@ -8126,7 +8110,7 @@
                   <a:srgbClr val="263044"/>
                 </a:solidFill>
               </a:rPr>
-              <a:t>    </a:t>
+              <a:t>        </a:t>
             </a:r>
             <a:r>
               <a:rPr b="1">
@@ -8134,7 +8118,7 @@
                   <a:srgbClr val="0969C3"/>
                 </a:solidFill>
               </a:rPr>
-              <a:t>var</a:t>
+              <a:t>return</a:t>
             </a:r>
             <a:r>
               <a:rPr b="0">
@@ -8142,15 +8126,47 @@
                   <a:srgbClr val="263044"/>
                 </a:solidFill>
               </a:rPr>
-              <a:t> canReadAll = user.</a:t>
+              <a:t> </a:t>
+            </a:r>
+            <a:r>
+              <a:rPr b="1">
+                <a:solidFill>
+                  <a:srgbClr val="0969C3"/>
+                </a:solidFill>
+              </a:rPr>
+              <a:t>new</a:t>
             </a:r>
             <a:r>
               <a:rPr b="0">
                 <a:solidFill>
+                  <a:srgbClr val="263044"/>
+                </a:solidFill>
+              </a:rPr>
+              <a:t>(</a:t>
+            </a:r>
+            <a:r>
+              <a:rPr b="1">
+                <a:solidFill>
+                  <a:srgbClr val="0969C3"/>
+                </a:solidFill>
+              </a:rPr>
+              <a:t>false</a:t>
+            </a:r>
+            <a:r>
+              <a:rPr b="0">
+                <a:solidFill>
+                  <a:srgbClr val="263044"/>
+                </a:solidFill>
+              </a:rPr>
+              <a:t>, </a:t>
+            </a:r>
+            <a:r>
+              <a:rPr b="0">
+                <a:solidFill>
                   <a:srgbClr val="7651D4"/>
                 </a:solidFill>
               </a:rPr>
-              <a:t>Can</a:t>
+              <a:t>ResourceAccessCodes</a:t>
             </a:r>
             <a:r>
               <a:rPr b="0">
@@ -8158,15 +8174,15 @@
                   <a:srgbClr val="263044"/>
                 </a:solidFill>
               </a:rPr>
-              <a:t>(</a:t>
+              <a:t>.</a:t>
             </a:r>
             <a:r>
               <a:rPr b="0">
                 <a:solidFill>
-                  <a:srgbClr val="B45309"/>
-                </a:solidFill>
-              </a:rPr>
-              <a:t>"record.read.all"</a:t>
+                  <a:srgbClr val="7651D4"/>
+                </a:solidFill>
+              </a:rPr>
+              <a:t>MissingReadPermission</a:t>
             </a:r>
             <a:r>
               <a:rPr b="0">
@@ -8179,6 +8195,9 @@
           </a:p>
           <a:p xmlns:a="http://schemas.openxmlformats.org/drawingml/2006/main">
             <a:pPr>
+              <a:lnSpc>
+                <a:spcPts val="1300"/>
+              </a:lnSpc>
               <a:buNone/>
               <a:defRPr sz="1050">
                 <a:solidFill>
@@ -8211,23 +8230,23 @@
                   <a:srgbClr val="263044"/>
                 </a:solidFill>
               </a:rPr>
-              <a:t> (!ownsRecord &amp;&amp; !canReadAll) </a:t>
-            </a:r>
-            <a:r>
-              <a:rPr b="1">
-                <a:solidFill>
-                  <a:srgbClr val="0969C3"/>
-                </a:solidFill>
-              </a:rPr>
-              <a:t>return</a:t>
+              <a:t> (resource.</a:t>
             </a:r>
             <a:r>
               <a:rPr b="0">
                 <a:solidFill>
+                  <a:srgbClr val="7651D4"/>
+                </a:solidFill>
+              </a:rPr>
+              <a:t>OwnerId</a:t>
+            </a:r>
+            <a:r>
+              <a:rPr b="0">
+                <a:solidFill>
                   <a:srgbClr val="263044"/>
                 </a:solidFill>
               </a:rPr>
-              <a:t> </a:t>
+              <a:t> == requester.</a:t>
             </a:r>
             <a:r>
               <a:rPr b="0">
@@ -8235,7 +8254,7 @@
                   <a:srgbClr val="7651D4"/>
                 </a:solidFill>
               </a:rPr>
-              <a:t>Result</a:t>
+              <a:t>ActorId</a:t>
             </a:r>
             <a:r>
               <a:rPr b="0">
@@ -8243,27 +8262,14 @@
                   <a:srgbClr val="263044"/>
                 </a:solidFill>
               </a:rPr>
-              <a:t>.</a:t>
-            </a:r>
-            <a:r>
-              <a:rPr b="0">
-                <a:solidFill>
-                  <a:srgbClr val="7651D4"/>
-                </a:solidFill>
-              </a:rPr>
-              <a:t>NotFound</a:t>
-            </a:r>
-            <a:r>
-              <a:rPr b="0">
-                <a:solidFill>
-                  <a:srgbClr val="263044"/>
-                </a:solidFill>
-              </a:rPr>
-              <a:t>();</a:t>
+              <a:t>)</a:t>
             </a:r>
           </a:p>
           <a:p xmlns:a="http://schemas.openxmlformats.org/drawingml/2006/main">
             <a:pPr>
+              <a:lnSpc>
+                <a:spcPts val="1300"/>
+              </a:lnSpc>
               <a:buNone/>
               <a:defRPr sz="1050">
                 <a:solidFill>
@@ -8280,7 +8286,7 @@
                   <a:srgbClr val="263044"/>
                 </a:solidFill>
               </a:rPr>
-              <a:t>    </a:t>
+              <a:t>        </a:t>
             </a:r>
             <a:r>
               <a:rPr b="1">
@@ -8288,7 +8294,7 @@
                   <a:srgbClr val="0969C3"/>
                 </a:solidFill>
               </a:rPr>
-              <a:t>if</a:t>
+              <a:t>return</a:t>
             </a:r>
             <a:r>
               <a:rPr b="0">
@@ -8296,15 +8302,47 @@
                   <a:srgbClr val="263044"/>
                 </a:solidFill>
               </a:rPr>
-              <a:t> (!policy.</a:t>
+              <a:t> </a:t>
+            </a:r>
+            <a:r>
+              <a:rPr b="1">
+                <a:solidFill>
+                  <a:srgbClr val="0969C3"/>
+                </a:solidFill>
+              </a:rPr>
+              <a:t>new</a:t>
             </a:r>
             <a:r>
               <a:rPr b="0">
                 <a:solidFill>
+                  <a:srgbClr val="263044"/>
+                </a:solidFill>
+              </a:rPr>
+              <a:t>(</a:t>
+            </a:r>
+            <a:r>
+              <a:rPr b="1">
+                <a:solidFill>
+                  <a:srgbClr val="0969C3"/>
+                </a:solidFill>
+              </a:rPr>
+              <a:t>true</a:t>
+            </a:r>
+            <a:r>
+              <a:rPr b="0">
+                <a:solidFill>
+                  <a:srgbClr val="263044"/>
+                </a:solidFill>
+              </a:rPr>
+              <a:t>, </a:t>
+            </a:r>
+            <a:r>
+              <a:rPr b="0">
+                <a:solidFill>
                   <a:srgbClr val="7651D4"/>
                 </a:solidFill>
               </a:rPr>
-              <a:t>Allows</a:t>
+              <a:t>ResourceAccessCodes</a:t>
             </a:r>
             <a:r>
               <a:rPr b="0">
@@ -8312,59 +8350,30 @@
                   <a:srgbClr val="263044"/>
                 </a:solidFill>
               </a:rPr>
-              <a:t>(</a:t>
-            </a:r>
-            <a:r>
-              <a:rPr b="1">
-                <a:solidFill>
-                  <a:srgbClr val="0969C3"/>
-                </a:solidFill>
-              </a:rPr>
-              <a:t>record</a:t>
+              <a:t>.</a:t>
             </a:r>
             <a:r>
               <a:rPr b="0">
                 <a:solidFill>
+                  <a:srgbClr val="7651D4"/>
+                </a:solidFill>
+              </a:rPr>
+              <a:t>OwnerAccess</a:t>
+            </a:r>
+            <a:r>
+              <a:rPr b="0">
+                <a:solidFill>
                   <a:srgbClr val="263044"/>
                 </a:solidFill>
               </a:rPr>
-              <a:t>.</a:t>
-            </a:r>
-            <a:r>
-              <a:rPr b="0">
-                <a:solidFill>
-                  <a:srgbClr val="7651D4"/>
-                </a:solidFill>
-              </a:rPr>
-              <a:t>Classification</a:t>
-            </a:r>
-            <a:r>
-              <a:rPr b="0">
-                <a:solidFill>
-                  <a:srgbClr val="263044"/>
-                </a:solidFill>
-              </a:rPr>
-              <a:t>, user.</a:t>
-            </a:r>
-            <a:r>
-              <a:rPr b="0">
-                <a:solidFill>
-                  <a:srgbClr val="7651D4"/>
-                </a:solidFill>
-              </a:rPr>
-              <a:t>Clearance</a:t>
-            </a:r>
-            <a:r>
-              <a:rPr b="0">
-                <a:solidFill>
-                  <a:srgbClr val="263044"/>
-                </a:solidFill>
-              </a:rPr>
-              <a:t>))</a:t>
+              <a:t>);</a:t>
             </a:r>
           </a:p>
           <a:p xmlns:a="http://schemas.openxmlformats.org/drawingml/2006/main">
             <a:pPr>
+              <a:lnSpc>
+                <a:spcPts val="1300"/>
+              </a:lnSpc>
               <a:buNone/>
               <a:defRPr sz="1050">
                 <a:solidFill>
@@ -8381,7 +8390,7 @@
                   <a:srgbClr val="263044"/>
                 </a:solidFill>
               </a:rPr>
-              <a:t>        </a:t>
+              <a:t>    </a:t>
             </a:r>
             <a:r>
               <a:rPr b="1">
@@ -8389,7 +8398,7 @@
                   <a:srgbClr val="0969C3"/>
                 </a:solidFill>
               </a:rPr>
-              <a:t>return</a:t>
+              <a:t>if</a:t>
             </a:r>
             <a:r>
               <a:rPr b="0">
@@ -8397,7 +8406,7 @@
                   <a:srgbClr val="263044"/>
                 </a:solidFill>
               </a:rPr>
-              <a:t> </a:t>
+              <a:t> (!requester.</a:t>
             </a:r>
             <a:r>
               <a:rPr b="0">
@@ -8405,7 +8414,7 @@
                   <a:srgbClr val="7651D4"/>
                 </a:solidFill>
               </a:rPr>
-              <a:t>Result</a:t>
+              <a:t>Permissions</a:t>
             </a:r>
             <a:r>
               <a:rPr b="0">
@@ -8421,7 +8430,7 @@
                   <a:srgbClr val="7651D4"/>
                 </a:solidFill>
               </a:rPr>
-              <a:t>Forbidden</a:t>
+              <a:t>Contains</a:t>
             </a:r>
             <a:r>
               <a:rPr b="0">
@@ -8429,11 +8438,46 @@
                   <a:srgbClr val="263044"/>
                 </a:solidFill>
               </a:rPr>
-              <a:t>();</a:t>
+              <a:t>(</a:t>
+            </a:r>
+            <a:r>
+              <a:rPr b="0">
+                <a:solidFill>
+                  <a:srgbClr val="7651D4"/>
+                </a:solidFill>
+              </a:rPr>
+              <a:t>Permissions</a:t>
+            </a:r>
+            <a:r>
+              <a:rPr b="0">
+                <a:solidFill>
+                  <a:srgbClr val="263044"/>
+                </a:solidFill>
+              </a:rPr>
+              <a:t>.</a:t>
+            </a:r>
+            <a:r>
+              <a:rPr b="0">
+                <a:solidFill>
+                  <a:srgbClr val="7651D4"/>
+                </a:solidFill>
+              </a:rPr>
+              <a:t>ReadAnyRecord</a:t>
+            </a:r>
+            <a:r>
+              <a:rPr b="0">
+                <a:solidFill>
+                  <a:srgbClr val="263044"/>
+                </a:solidFill>
+              </a:rPr>
+              <a:t>))</a:t>
             </a:r>
           </a:p>
           <a:p xmlns:a="http://schemas.openxmlformats.org/drawingml/2006/main">
             <a:pPr>
+              <a:lnSpc>
+                <a:spcPts val="1300"/>
+              </a:lnSpc>
               <a:buNone/>
               <a:defRPr sz="1050">
                 <a:solidFill>
@@ -8450,6 +8494,110 @@
                   <a:srgbClr val="263044"/>
                 </a:solidFill>
               </a:rPr>
+              <a:t>        </a:t>
+            </a:r>
+            <a:r>
+              <a:rPr b="1">
+                <a:solidFill>
+                  <a:srgbClr val="0969C3"/>
+                </a:solidFill>
+              </a:rPr>
+              <a:t>return</a:t>
+            </a:r>
+            <a:r>
+              <a:rPr b="0">
+                <a:solidFill>
+                  <a:srgbClr val="263044"/>
+                </a:solidFill>
+              </a:rPr>
+              <a:t> </a:t>
+            </a:r>
+            <a:r>
+              <a:rPr b="1">
+                <a:solidFill>
+                  <a:srgbClr val="0969C3"/>
+                </a:solidFill>
+              </a:rPr>
+              <a:t>new</a:t>
+            </a:r>
+            <a:r>
+              <a:rPr b="0">
+                <a:solidFill>
+                  <a:srgbClr val="263044"/>
+                </a:solidFill>
+              </a:rPr>
+              <a:t>(</a:t>
+            </a:r>
+            <a:r>
+              <a:rPr b="1">
+                <a:solidFill>
+                  <a:srgbClr val="0969C3"/>
+                </a:solidFill>
+              </a:rPr>
+              <a:t>false</a:t>
+            </a:r>
+            <a:r>
+              <a:rPr b="0">
+                <a:solidFill>
+                  <a:srgbClr val="263044"/>
+                </a:solidFill>
+              </a:rPr>
+              <a:t>, </a:t>
+            </a:r>
+            <a:r>
+              <a:rPr b="0">
+                <a:solidFill>
+                  <a:srgbClr val="7651D4"/>
+                </a:solidFill>
+              </a:rPr>
+              <a:t>ResourceAccessCodes</a:t>
+            </a:r>
+            <a:r>
+              <a:rPr b="0">
+                <a:solidFill>
+                  <a:srgbClr val="263044"/>
+                </a:solidFill>
+              </a:rPr>
+              <a:t>.</a:t>
+            </a:r>
+            <a:r>
+              <a:rPr b="0">
+                <a:solidFill>
+                  <a:srgbClr val="7651D4"/>
+                </a:solidFill>
+              </a:rPr>
+              <a:t>NotOwner</a:t>
+            </a:r>
+            <a:r>
+              <a:rPr b="0">
+                <a:solidFill>
+                  <a:srgbClr val="263044"/>
+                </a:solidFill>
+              </a:rPr>
+              <a:t>);</a:t>
+            </a:r>
+          </a:p>
+          <a:p xmlns:a="http://schemas.openxmlformats.org/drawingml/2006/main">
+            <a:pPr>
+              <a:lnSpc>
+                <a:spcPts val="1300"/>
+              </a:lnSpc>
+              <a:buNone/>
+              <a:defRPr sz="1050">
+                <a:solidFill>
+                  <a:srgbClr val="263044"/>
+                </a:solidFill>
+                <a:latin typeface="Consolas"/>
+                <a:ea typeface="Consolas"/>
+                <a:cs typeface="Consolas"/>
+              </a:defRPr>
+            </a:pPr>
+            <a:r>
+              <a:rPr b="0">
+                <a:solidFill>
+                  <a:srgbClr val="263044"/>
+                </a:solidFill>
+              </a:rPr>
               <a:t>    </a:t>
             </a:r>
             <a:r>
@@ -8466,7 +8614,7 @@
                   <a:srgbClr val="263044"/>
                 </a:solidFill>
               </a:rPr>
-              <a:t> </a:t>
+              <a:t> resource.</a:t>
             </a:r>
             <a:r>
               <a:rPr b="0">
@@ -8474,7 +8622,7 @@
                   <a:srgbClr val="7651D4"/>
                 </a:solidFill>
               </a:rPr>
-              <a:t>Result</a:t>
+              <a:t>Classification</a:t>
             </a:r>
             <a:r>
               <a:rPr b="0">
@@ -8482,6 +8630,22 @@
                   <a:srgbClr val="263044"/>
                 </a:solidFill>
               </a:rPr>
+              <a:t> == </a:t>
+            </a:r>
+            <a:r>
+              <a:rPr b="0">
+                <a:solidFill>
+                  <a:srgbClr val="7651D4"/>
+                </a:solidFill>
+              </a:rPr>
+              <a:t>DataClassification</a:t>
+            </a:r>
+            <a:r>
+              <a:rPr b="0">
+                <a:solidFill>
+                  <a:srgbClr val="263044"/>
+                </a:solidFill>
+              </a:rPr>
               <a:t>.</a:t>
             </a:r>
             <a:r>
@@ -8490,23 +8654,71 @@
                   <a:srgbClr val="7651D4"/>
                 </a:solidFill>
               </a:rPr>
-              <a:t>Ok</a:t>
-            </a:r>
+              <a:t>Restricted</a:t>
+            </a:r>
+          </a:p>
+          <a:p xmlns:a="http://schemas.openxmlformats.org/drawingml/2006/main">
+            <a:pPr>
+              <a:lnSpc>
+                <a:spcPts val="1300"/>
+              </a:lnSpc>
+              <a:buNone/>
+              <a:defRPr sz="1050">
+                <a:solidFill>
+                  <a:srgbClr val="263044"/>
+                </a:solidFill>
+                <a:latin typeface="Consolas"/>
+                <a:ea typeface="Consolas"/>
+                <a:cs typeface="Consolas"/>
+              </a:defRPr>
+            </a:pPr>
             <a:r>
               <a:rPr b="0">
                 <a:solidFill>
                   <a:srgbClr val="263044"/>
                 </a:solidFill>
               </a:rPr>
-              <a:t>(mapper.</a:t>
+              <a:t>        ? </a:t>
+            </a:r>
+            <a:r>
+              <a:rPr b="1">
+                <a:solidFill>
+                  <a:srgbClr val="0969C3"/>
+                </a:solidFill>
+              </a:rPr>
+              <a:t>new</a:t>
             </a:r>
             <a:r>
               <a:rPr b="0">
                 <a:solidFill>
+                  <a:srgbClr val="263044"/>
+                </a:solidFill>
+              </a:rPr>
+              <a:t>(</a:t>
+            </a:r>
+            <a:r>
+              <a:rPr b="1">
+                <a:solidFill>
+                  <a:srgbClr val="0969C3"/>
+                </a:solidFill>
+              </a:rPr>
+              <a:t>false</a:t>
+            </a:r>
+            <a:r>
+              <a:rPr b="0">
+                <a:solidFill>
+                  <a:srgbClr val="263044"/>
+                </a:solidFill>
+              </a:rPr>
+              <a:t>, </a:t>
+            </a:r>
+            <a:r>
+              <a:rPr b="0">
+                <a:solidFill>
                   <a:srgbClr val="7651D4"/>
                 </a:solidFill>
               </a:rPr>
-              <a:t>ToDto</a:t>
+              <a:t>ResourceAccessCodes</a:t>
             </a:r>
             <a:r>
               <a:rPr b="0">
@@ -8514,6 +8726,62 @@
                   <a:srgbClr val="263044"/>
                 </a:solidFill>
               </a:rPr>
+              <a:t>.</a:t>
+            </a:r>
+            <a:r>
+              <a:rPr b="0">
+                <a:solidFill>
+                  <a:srgbClr val="7651D4"/>
+                </a:solidFill>
+              </a:rPr>
+              <a:t>RestrictedToOwner</a:t>
+            </a:r>
+            <a:r>
+              <a:rPr b="0">
+                <a:solidFill>
+                  <a:srgbClr val="263044"/>
+                </a:solidFill>
+              </a:rPr>
+              <a:t>)</a:t>
+            </a:r>
+          </a:p>
+          <a:p xmlns:a="http://schemas.openxmlformats.org/drawingml/2006/main">
+            <a:pPr>
+              <a:lnSpc>
+                <a:spcPts val="1300"/>
+              </a:lnSpc>
+              <a:buNone/>
+              <a:defRPr sz="1050">
+                <a:solidFill>
+                  <a:srgbClr val="263044"/>
+                </a:solidFill>
+                <a:latin typeface="Consolas"/>
+                <a:ea typeface="Consolas"/>
+                <a:cs typeface="Consolas"/>
+              </a:defRPr>
+            </a:pPr>
+            <a:r>
+              <a:rPr b="0">
+                <a:solidFill>
+                  <a:srgbClr val="263044"/>
+                </a:solidFill>
+              </a:rPr>
+              <a:t>        : </a:t>
+            </a:r>
+            <a:r>
+              <a:rPr b="1">
+                <a:solidFill>
+                  <a:srgbClr val="0969C3"/>
+                </a:solidFill>
+              </a:rPr>
+              <a:t>new</a:t>
+            </a:r>
+            <a:r>
+              <a:rPr b="0">
+                <a:solidFill>
+                  <a:srgbClr val="263044"/>
+                </a:solidFill>
+              </a:rPr>
               <a:t>(</a:t>
             </a:r>
             <a:r>
@@ -8522,7 +8790,7 @@
                   <a:srgbClr val="0969C3"/>
                 </a:solidFill>
               </a:rPr>
-              <a:t>record</a:t>
+              <a:t>true</a:t>
             </a:r>
             <a:r>
               <a:rPr b="0">
@@ -8530,11 +8798,46 @@
                   <a:srgbClr val="263044"/>
                 </a:solidFill>
               </a:rPr>
-              <a:t>));</a:t>
+              <a:t>, </a:t>
+            </a:r>
+            <a:r>
+              <a:rPr b="0">
+                <a:solidFill>
+                  <a:srgbClr val="7651D4"/>
+                </a:solidFill>
+              </a:rPr>
+              <a:t>ResourceAccessCodes</a:t>
+            </a:r>
+            <a:r>
+              <a:rPr b="0">
+                <a:solidFill>
+                  <a:srgbClr val="263044"/>
+                </a:solidFill>
+              </a:rPr>
+              <a:t>.</a:t>
+            </a:r>
+            <a:r>
+              <a:rPr b="0">
+                <a:solidFill>
+                  <a:srgbClr val="7651D4"/>
+                </a:solidFill>
+              </a:rPr>
+              <a:t>ElevatedAccess</a:t>
+            </a:r>
+            <a:r>
+              <a:rPr b="0">
+                <a:solidFill>
+                  <a:srgbClr val="263044"/>
+                </a:solidFill>
+              </a:rPr>
+              <a:t>);</a:t>
             </a:r>
           </a:p>
           <a:p xmlns:a="http://schemas.openxmlformats.org/drawingml/2006/main">
             <a:pPr>
+              <a:lnSpc>
+                <a:spcPts val="1300"/>
+              </a:lnSpc>
               <a:buNone/>
               <a:defRPr sz="1050">
                 <a:solidFill>
@@ -9171,7 +9474,7 @@
                 <a:ea typeface="Aptos"/>
                 <a:cs typeface="Aptos"/>
               </a:rPr>
-              <a:t>Тест мења власништво ресурса и очекује одбијање без откривања података о постојању туђег записа.</a:t>
+              <a:t>Тест мења власника ресурса и очекује одбијање са стабилним кодом разлога.</a:t>
             </a:r>
           </a:p>
         </p:txBody>
@@ -9193,7 +9496,7 @@
         <p:spPr>
           <a:xfrm xmlns:a="http://schemas.openxmlformats.org/drawingml/2006/main">
             <a:off x="666750" y="2095500"/>
-            <a:ext cx="6858000" cy="2524125"/>
+            <a:ext cx="6858000" cy="2317250"/>
           </a:xfrm>
           <a:prstGeom xmlns:a="http://schemas.openxmlformats.org/drawingml/2006/main" prst="roundRect">
             <a:avLst>
@@ -9375,7 +9678,7 @@
           <a:p xmlns:a="http://schemas.openxmlformats.org/drawingml/2006/main">
             <a:pPr algn="r">
               <a:lnSpc>
-                <a:spcPct val="100000"/>
+                <a:spcPts val="1300"/>
               </a:lnSpc>
               <a:buNone/>
               <a:defRPr sz="975" b="0">
@@ -9402,7 +9705,7 @@
           <a:p xmlns:a="http://schemas.openxmlformats.org/drawingml/2006/main">
             <a:pPr algn="r">
               <a:lnSpc>
-                <a:spcPct val="100000"/>
+                <a:spcPts val="1300"/>
               </a:lnSpc>
               <a:buNone/>
               <a:defRPr sz="975" b="0">
@@ -9429,7 +9732,7 @@
           <a:p xmlns:a="http://schemas.openxmlformats.org/drawingml/2006/main">
             <a:pPr algn="r">
               <a:lnSpc>
-                <a:spcPct val="100000"/>
+                <a:spcPts val="1300"/>
               </a:lnSpc>
               <a:buNone/>
               <a:defRPr sz="975" b="0">
@@ -9456,7 +9759,7 @@
           <a:p xmlns:a="http://schemas.openxmlformats.org/drawingml/2006/main">
             <a:pPr algn="r">
               <a:lnSpc>
-                <a:spcPct val="100000"/>
+                <a:spcPts val="1300"/>
               </a:lnSpc>
               <a:buNone/>
               <a:defRPr sz="975" b="0">
@@ -9483,7 +9786,7 @@
           <a:p xmlns:a="http://schemas.openxmlformats.org/drawingml/2006/main">
             <a:pPr algn="r">
               <a:lnSpc>
-                <a:spcPct val="100000"/>
+                <a:spcPts val="1300"/>
               </a:lnSpc>
               <a:buNone/>
               <a:defRPr sz="975" b="0">
@@ -9510,7 +9813,7 @@
           <a:p xmlns:a="http://schemas.openxmlformats.org/drawingml/2006/main">
             <a:pPr algn="r">
               <a:lnSpc>
-                <a:spcPct val="100000"/>
+                <a:spcPts val="1300"/>
               </a:lnSpc>
               <a:buNone/>
               <a:defRPr sz="975" b="0">
@@ -9537,7 +9840,7 @@
           <a:p xmlns:a="http://schemas.openxmlformats.org/drawingml/2006/main">
             <a:pPr algn="r">
               <a:lnSpc>
-                <a:spcPct val="100000"/>
+                <a:spcPts val="1300"/>
               </a:lnSpc>
               <a:buNone/>
               <a:defRPr sz="975" b="0">
@@ -9564,7 +9867,7 @@
           <a:p xmlns:a="http://schemas.openxmlformats.org/drawingml/2006/main">
             <a:pPr algn="r">
               <a:lnSpc>
-                <a:spcPct val="100000"/>
+                <a:spcPts val="1300"/>
               </a:lnSpc>
               <a:buNone/>
               <a:defRPr sz="975" b="0">
@@ -9591,7 +9894,7 @@
           <a:p xmlns:a="http://schemas.openxmlformats.org/drawingml/2006/main">
             <a:pPr algn="r">
               <a:lnSpc>
-                <a:spcPct val="100000"/>
+                <a:spcPts val="1300"/>
               </a:lnSpc>
               <a:buNone/>
               <a:defRPr sz="975" b="0">
@@ -9618,7 +9921,7 @@
           <a:p xmlns:a="http://schemas.openxmlformats.org/drawingml/2006/main">
             <a:pPr algn="r">
               <a:lnSpc>
-                <a:spcPct val="100000"/>
+                <a:spcPts val="1300"/>
               </a:lnSpc>
               <a:buNone/>
               <a:defRPr sz="975" b="0">
@@ -9642,15 +9945,49 @@
               <a:t>10</a:t>
             </a:r>
           </a:p>
-          <a:p xmlns:a="http://schemas.openxmlformats.org/drawingml/2006/main">
-            <a:pPr algn="r">
-              <a:lnSpc>
-                <a:spcPct val="100000"/>
-              </a:lnSpc>
-              <a:buNone/>
-              <a:defRPr sz="975" b="0">
-                <a:solidFill>
-                  <a:srgbClr val="8792A6"/>
+        </p:txBody>
+      </p:sp>
+      <p:sp>
+        <p:nvSpPr>
+          <p:cNvPr id="12" name="Rectangle 11">
+            <a:extLst xmlns:a="http://schemas.openxmlformats.org/drawingml/2006/main">
+              <a:ext uri="{FF2B5EF4-FFF2-40B4-BE49-F238E27FC236}">
+                <a16:creationId xmlns:a16="http://schemas.microsoft.com/office/drawing/2014/main" id="{82EF0C64-3A96-4739-99A8-F84347FC9123}"/>
+              </a:ext>
+            </a:extLst>
+          </p:cNvPr>
+          <p:cNvSpPr>
+            <a:spLocks xmlns:a="http://schemas.openxmlformats.org/drawingml/2006/main" noGrp="1"/>
+          </p:cNvSpPr>
+          <p:nvPr/>
+        </p:nvSpPr>
+        <p:spPr>
+          <a:xfrm xmlns:a="http://schemas.openxmlformats.org/drawingml/2006/main">
+            <a:off x="1200150" y="2571750"/>
+            <a:ext cx="6153150" cy="3028950"/>
+          </a:xfrm>
+          <a:prstGeom xmlns:a="http://schemas.openxmlformats.org/drawingml/2006/main" prst="rect">
+            <a:avLst/>
+          </a:prstGeom>
+          <a:noFill xmlns:a="http://schemas.openxmlformats.org/drawingml/2006/main"/>
+          <a:ln xmlns:a="http://schemas.openxmlformats.org/drawingml/2006/main" w="0">
+            <a:noFill/>
+          </a:ln>
+        </p:spPr>
+        <p:txBody>
+          <a:bodyPr xmlns:a="http://schemas.openxmlformats.org/drawingml/2006/main" wrap="square" lIns="0" tIns="0" rIns="0" bIns="0" anchor="t">
+            <a:normAutofit/>
+          </a:bodyPr>
+          <a:lstStyle xmlns:a="http://schemas.openxmlformats.org/drawingml/2006/main"/>
+          <a:p xmlns:a="http://schemas.openxmlformats.org/drawingml/2006/main">
+            <a:pPr>
+              <a:lnSpc>
+                <a:spcPts val="1300"/>
+              </a:lnSpc>
+              <a:buNone/>
+              <a:defRPr sz="1050">
+                <a:solidFill>
+                  <a:srgbClr val="263044"/>
                 </a:solidFill>
                 <a:latin typeface="Consolas"/>
                 <a:ea typeface="Consolas"/>
@@ -9658,53 +9995,99 @@
               </a:defRPr>
             </a:pPr>
             <a:r>
-              <a:rPr sz="975" b="0">
-                <a:solidFill>
-                  <a:srgbClr val="8792A6"/>
+              <a:rPr b="0">
+                <a:solidFill>
+                  <a:srgbClr val="263044"/>
+                </a:solidFill>
+              </a:rPr>
+              <a:t>[</a:t>
+            </a:r>
+            <a:r>
+              <a:rPr b="0">
+                <a:solidFill>
+                  <a:srgbClr val="7651D4"/>
+                </a:solidFill>
+              </a:rPr>
+              <a:t>Test</a:t>
+            </a:r>
+            <a:r>
+              <a:rPr b="0">
+                <a:solidFill>
+                  <a:srgbClr val="263044"/>
+                </a:solidFill>
+              </a:rPr>
+              <a:t>]</a:t>
+            </a:r>
+          </a:p>
+          <a:p xmlns:a="http://schemas.openxmlformats.org/drawingml/2006/main">
+            <a:pPr>
+              <a:lnSpc>
+                <a:spcPts val="1300"/>
+              </a:lnSpc>
+              <a:buNone/>
+              <a:defRPr sz="1050">
+                <a:solidFill>
+                  <a:srgbClr val="263044"/>
                 </a:solidFill>
                 <a:latin typeface="Consolas"/>
                 <a:ea typeface="Consolas"/>
                 <a:cs typeface="Consolas"/>
-              </a:rPr>
-              <a:t>11</a:t>
-            </a:r>
-          </a:p>
-        </p:txBody>
-      </p:sp>
-      <p:sp>
-        <p:nvSpPr>
-          <p:cNvPr id="12" name="Rectangle 11">
-            <a:extLst xmlns:a="http://schemas.openxmlformats.org/drawingml/2006/main">
-              <a:ext uri="{FF2B5EF4-FFF2-40B4-BE49-F238E27FC236}">
-                <a16:creationId xmlns:a16="http://schemas.microsoft.com/office/drawing/2014/main" id="{82EF0C64-3A96-4739-99A8-F84347FC9123}"/>
-              </a:ext>
-            </a:extLst>
-          </p:cNvPr>
-          <p:cNvSpPr>
-            <a:spLocks xmlns:a="http://schemas.openxmlformats.org/drawingml/2006/main" noGrp="1"/>
-          </p:cNvSpPr>
-          <p:nvPr/>
-        </p:nvSpPr>
-        <p:spPr>
-          <a:xfrm xmlns:a="http://schemas.openxmlformats.org/drawingml/2006/main">
-            <a:off x="1200150" y="2571750"/>
-            <a:ext cx="6153150" cy="3028950"/>
-          </a:xfrm>
-          <a:prstGeom xmlns:a="http://schemas.openxmlformats.org/drawingml/2006/main" prst="rect">
-            <a:avLst/>
-          </a:prstGeom>
-          <a:noFill xmlns:a="http://schemas.openxmlformats.org/drawingml/2006/main"/>
-          <a:ln xmlns:a="http://schemas.openxmlformats.org/drawingml/2006/main" w="0">
-            <a:noFill/>
-          </a:ln>
-        </p:spPr>
-        <p:txBody>
-          <a:bodyPr xmlns:a="http://schemas.openxmlformats.org/drawingml/2006/main" wrap="square" lIns="0" tIns="0" rIns="0" bIns="0" anchor="t">
-            <a:normAutofit/>
-          </a:bodyPr>
-          <a:lstStyle xmlns:a="http://schemas.openxmlformats.org/drawingml/2006/main"/>
+              </a:defRPr>
+            </a:pPr>
+            <a:r>
+              <a:rPr b="1">
+                <a:solidFill>
+                  <a:srgbClr val="0969C3"/>
+                </a:solidFill>
+              </a:rPr>
+              <a:t>public</a:t>
+            </a:r>
+            <a:r>
+              <a:rPr b="0">
+                <a:solidFill>
+                  <a:srgbClr val="263044"/>
+                </a:solidFill>
+              </a:rPr>
+              <a:t> </a:t>
+            </a:r>
+            <a:r>
+              <a:rPr b="1">
+                <a:solidFill>
+                  <a:srgbClr val="0969C3"/>
+                </a:solidFill>
+              </a:rPr>
+              <a:t>void</a:t>
+            </a:r>
+            <a:r>
+              <a:rPr b="0">
+                <a:solidFill>
+                  <a:srgbClr val="263044"/>
+                </a:solidFill>
+              </a:rPr>
+              <a:t> </a:t>
+            </a:r>
+            <a:r>
+              <a:rPr b="0">
+                <a:solidFill>
+                  <a:srgbClr val="7651D4"/>
+                </a:solidFill>
+              </a:rPr>
+              <a:t>Decide_WhenRequesterIsNotOwner_Denies</a:t>
+            </a:r>
+            <a:r>
+              <a:rPr b="0">
+                <a:solidFill>
+                  <a:srgbClr val="263044"/>
+                </a:solidFill>
+              </a:rPr>
+              <a:t>()</a:t>
+            </a:r>
+          </a:p>
           <a:p xmlns:a="http://schemas.openxmlformats.org/drawingml/2006/main">
             <a:pPr>
+              <a:lnSpc>
+                <a:spcPts val="1300"/>
+              </a:lnSpc>
               <a:buNone/>
               <a:defRPr sz="1050">
                 <a:solidFill>
@@ -9721,27 +10104,14 @@
                   <a:srgbClr val="263044"/>
                 </a:solidFill>
               </a:rPr>
-              <a:t>[</a:t>
-            </a:r>
-            <a:r>
-              <a:rPr b="0">
-                <a:solidFill>
-                  <a:srgbClr val="7651D4"/>
-                </a:solidFill>
-              </a:rPr>
-              <a:t>Fact</a:t>
-            </a:r>
-            <a:r>
-              <a:rPr b="0">
-                <a:solidFill>
-                  <a:srgbClr val="263044"/>
-                </a:solidFill>
-              </a:rPr>
-              <a:t>]</a:t>
+              <a:t>{</a:t>
             </a:r>
           </a:p>
           <a:p xmlns:a="http://schemas.openxmlformats.org/drawingml/2006/main">
             <a:pPr>
+              <a:lnSpc>
+                <a:spcPts val="1300"/>
+              </a:lnSpc>
               <a:buNone/>
               <a:defRPr sz="1050">
                 <a:solidFill>
@@ -9753,12 +10123,20 @@
               </a:defRPr>
             </a:pPr>
             <a:r>
+              <a:rPr b="0">
+                <a:solidFill>
+                  <a:srgbClr val="263044"/>
+                </a:solidFill>
+              </a:rPr>
+              <a:t>    </a:t>
+            </a:r>
+            <a:r>
               <a:rPr b="1">
                 <a:solidFill>
                   <a:srgbClr val="0969C3"/>
                 </a:solidFill>
               </a:rPr>
-              <a:t>public</a:t>
+              <a:t>var</a:t>
             </a:r>
             <a:r>
               <a:rPr b="0">
@@ -9766,43 +10144,30 @@
                   <a:srgbClr val="263044"/>
                 </a:solidFill>
               </a:rPr>
-              <a:t> </a:t>
-            </a:r>
-            <a:r>
-              <a:rPr b="1">
-                <a:solidFill>
-                  <a:srgbClr val="0969C3"/>
-                </a:solidFill>
-              </a:rPr>
-              <a:t>void</a:t>
+              <a:t> decision = _policy.</a:t>
             </a:r>
             <a:r>
               <a:rPr b="0">
                 <a:solidFill>
+                  <a:srgbClr val="7651D4"/>
+                </a:solidFill>
+              </a:rPr>
+              <a:t>Decide</a:t>
+            </a:r>
+            <a:r>
+              <a:rPr b="0">
+                <a:solidFill>
                   <a:srgbClr val="263044"/>
                 </a:solidFill>
               </a:rPr>
-              <a:t> </a:t>
-            </a:r>
-            <a:r>
-              <a:rPr b="0">
-                <a:solidFill>
-                  <a:srgbClr val="7651D4"/>
-                </a:solidFill>
-              </a:rPr>
-              <a:t>Reader_cannot_open_another_users_record</a:t>
-            </a:r>
-            <a:r>
-              <a:rPr b="0">
-                <a:solidFill>
-                  <a:srgbClr val="263044"/>
-                </a:solidFill>
-              </a:rPr>
-              <a:t>()</a:t>
+              <a:t>(</a:t>
             </a:r>
           </a:p>
           <a:p xmlns:a="http://schemas.openxmlformats.org/drawingml/2006/main">
             <a:pPr>
+              <a:lnSpc>
+                <a:spcPts val="1300"/>
+              </a:lnSpc>
               <a:buNone/>
               <a:defRPr sz="1050">
                 <a:solidFill>
@@ -9819,11 +10184,78 @@
                   <a:srgbClr val="263044"/>
                 </a:solidFill>
               </a:rPr>
-              <a:t>{</a:t>
+              <a:t>        </a:t>
+            </a:r>
+            <a:r>
+              <a:rPr b="0">
+                <a:solidFill>
+                  <a:srgbClr val="7651D4"/>
+                </a:solidFill>
+              </a:rPr>
+              <a:t>Requester</a:t>
+            </a:r>
+            <a:r>
+              <a:rPr b="0">
+                <a:solidFill>
+                  <a:srgbClr val="263044"/>
+                </a:solidFill>
+              </a:rPr>
+              <a:t>(</a:t>
+            </a:r>
+            <a:r>
+              <a:rPr b="0">
+                <a:solidFill>
+                  <a:srgbClr val="B45309"/>
+                </a:solidFill>
+              </a:rPr>
+              <a:t>"marko"</a:t>
+            </a:r>
+            <a:r>
+              <a:rPr b="0">
+                <a:solidFill>
+                  <a:srgbClr val="263044"/>
+                </a:solidFill>
+              </a:rPr>
+              <a:t>, </a:t>
+            </a:r>
+            <a:r>
+              <a:rPr b="0">
+                <a:solidFill>
+                  <a:srgbClr val="7651D4"/>
+                </a:solidFill>
+              </a:rPr>
+              <a:t>Permissions</a:t>
+            </a:r>
+            <a:r>
+              <a:rPr b="0">
+                <a:solidFill>
+                  <a:srgbClr val="263044"/>
+                </a:solidFill>
+              </a:rPr>
+              <a:t>.</a:t>
+            </a:r>
+            <a:r>
+              <a:rPr b="0">
+                <a:solidFill>
+                  <a:srgbClr val="7651D4"/>
+                </a:solidFill>
+              </a:rPr>
+              <a:t>ReadRecords</a:t>
+            </a:r>
+            <a:r>
+              <a:rPr b="0">
+                <a:solidFill>
+                  <a:srgbClr val="263044"/>
+                </a:solidFill>
+              </a:rPr>
+              <a:t>),</a:t>
             </a:r>
           </a:p>
           <a:p xmlns:a="http://schemas.openxmlformats.org/drawingml/2006/main">
             <a:pPr>
+              <a:lnSpc>
+                <a:spcPts val="1300"/>
+              </a:lnSpc>
               <a:buNone/>
               <a:defRPr sz="1050">
                 <a:solidFill>
@@ -9840,23 +10272,23 @@
                   <a:srgbClr val="263044"/>
                 </a:solidFill>
               </a:rPr>
-              <a:t>    </a:t>
-            </a:r>
-            <a:r>
-              <a:rPr b="1">
-                <a:solidFill>
-                  <a:srgbClr val="0969C3"/>
-                </a:solidFill>
-              </a:rPr>
-              <a:t>var</a:t>
+              <a:t>        </a:t>
             </a:r>
             <a:r>
               <a:rPr b="0">
                 <a:solidFill>
+                  <a:srgbClr val="7651D4"/>
+                </a:solidFill>
+              </a:rPr>
+              <a:t>Resource</a:t>
+            </a:r>
+            <a:r>
+              <a:rPr b="0">
+                <a:solidFill>
                   <a:srgbClr val="263044"/>
                 </a:solidFill>
               </a:rPr>
-              <a:t> user = </a:t>
+              <a:t>(</a:t>
             </a:r>
             <a:r>
               <a:rPr b="0">
@@ -9864,7 +10296,7 @@
                   <a:srgbClr val="7651D4"/>
                 </a:solidFill>
               </a:rPr>
-              <a:t>User</a:t>
+              <a:t>DataClassification</a:t>
             </a:r>
             <a:r>
               <a:rPr b="0">
@@ -9880,7 +10312,7 @@
                   <a:srgbClr val="7651D4"/>
                 </a:solidFill>
               </a:rPr>
-              <a:t>With</a:t>
+              <a:t>Internal</a:t>
             </a:r>
             <a:r>
               <a:rPr b="0">
@@ -9888,43 +10320,14 @@
                   <a:srgbClr val="263044"/>
                 </a:solidFill>
               </a:rPr>
-              <a:t>(</a:t>
-            </a:r>
-            <a:r>
-              <a:rPr b="0">
-                <a:solidFill>
-                  <a:srgbClr val="B45309"/>
-                </a:solidFill>
-              </a:rPr>
-              <a:t>"record.read"</a:t>
-            </a:r>
-            <a:r>
-              <a:rPr b="0">
-                <a:solidFill>
-                  <a:srgbClr val="263044"/>
-                </a:solidFill>
-              </a:rPr>
-              <a:t>, id: </a:t>
-            </a:r>
-            <a:r>
-              <a:rPr b="0">
-                <a:solidFill>
-                  <a:srgbClr val="B45309"/>
-                </a:solidFill>
-              </a:rPr>
-              <a:t>"u-17"</a:t>
-            </a:r>
-            <a:r>
-              <a:rPr b="0">
-                <a:solidFill>
-                  <a:srgbClr val="263044"/>
-                </a:solidFill>
-              </a:rPr>
-              <a:t>);</a:t>
+              <a:t>));</a:t>
             </a:r>
           </a:p>
           <a:p xmlns:a="http://schemas.openxmlformats.org/drawingml/2006/main">
             <a:pPr>
+              <a:lnSpc>
+                <a:spcPts val="1300"/>
+              </a:lnSpc>
               <a:buNone/>
               <a:defRPr sz="1050">
                 <a:solidFill>
@@ -9941,123 +10344,14 @@
                   <a:srgbClr val="263044"/>
                 </a:solidFill>
               </a:rPr>
-              <a:t>    </a:t>
-            </a:r>
-            <a:r>
-              <a:rPr b="1">
-                <a:solidFill>
-                  <a:srgbClr val="0969C3"/>
-                </a:solidFill>
-              </a:rPr>
-              <a:t>var</a:t>
-            </a:r>
-            <a:r>
-              <a:rPr b="0">
-                <a:solidFill>
-                  <a:srgbClr val="263044"/>
-                </a:solidFill>
-              </a:rPr>
               <a:t> </a:t>
             </a:r>
-            <a:r>
-              <a:rPr b="1">
-                <a:solidFill>
-                  <a:srgbClr val="0969C3"/>
-                </a:solidFill>
-              </a:rPr>
-              <a:t>record</a:t>
-            </a:r>
-            <a:r>
-              <a:rPr b="0">
-                <a:solidFill>
-                  <a:srgbClr val="263044"/>
-                </a:solidFill>
-              </a:rPr>
-              <a:t> = </a:t>
-            </a:r>
-            <a:r>
-              <a:rPr b="0">
-                <a:solidFill>
-                  <a:srgbClr val="7651D4"/>
-                </a:solidFill>
-              </a:rPr>
-              <a:t>Record</a:t>
-            </a:r>
-            <a:r>
-              <a:rPr b="0">
-                <a:solidFill>
-                  <a:srgbClr val="263044"/>
-                </a:solidFill>
-              </a:rPr>
-              <a:t>.</a:t>
-            </a:r>
-            <a:r>
-              <a:rPr b="0">
-                <a:solidFill>
-                  <a:srgbClr val="7651D4"/>
-                </a:solidFill>
-              </a:rPr>
-              <a:t>OwnedBy</a:t>
-            </a:r>
-            <a:r>
-              <a:rPr b="0">
-                <a:solidFill>
-                  <a:srgbClr val="263044"/>
-                </a:solidFill>
-              </a:rPr>
-              <a:t>(</a:t>
-            </a:r>
-            <a:r>
-              <a:rPr b="0">
-                <a:solidFill>
-                  <a:srgbClr val="B45309"/>
-                </a:solidFill>
-              </a:rPr>
-              <a:t>"u-99"</a:t>
-            </a:r>
-            <a:r>
-              <a:rPr b="0">
-                <a:solidFill>
-                  <a:srgbClr val="263044"/>
-                </a:solidFill>
-              </a:rPr>
-              <a:t>, </a:t>
-            </a:r>
-            <a:r>
-              <a:rPr b="0">
-                <a:solidFill>
-                  <a:srgbClr val="7651D4"/>
-                </a:solidFill>
-              </a:rPr>
-              <a:t>Classification</a:t>
-            </a:r>
-            <a:r>
-              <a:rPr b="0">
-                <a:solidFill>
-                  <a:srgbClr val="263044"/>
-                </a:solidFill>
-              </a:rPr>
-              <a:t>.</a:t>
-            </a:r>
-            <a:r>
-              <a:rPr b="0">
-                <a:solidFill>
-                  <a:srgbClr val="7651D4"/>
-                </a:solidFill>
-              </a:rPr>
-              <a:t>Internal</a:t>
-            </a:r>
-            <a:r>
-              <a:rPr b="0">
-                <a:solidFill>
-                  <a:srgbClr val="263044"/>
-                </a:solidFill>
-              </a:rPr>
-              <a:t>);</a:t>
-            </a:r>
           </a:p>
           <a:p xmlns:a="http://schemas.openxmlformats.org/drawingml/2006/main">
             <a:pPr>
+              <a:lnSpc>
+                <a:spcPts val="1300"/>
+              </a:lnSpc>
               <a:buNone/>
               <a:defRPr sz="1050">
                 <a:solidFill>
@@ -10068,14 +10362,84 @@
                 <a:cs typeface="Consolas"/>
               </a:defRPr>
             </a:pPr>
-            <a:endParaRPr b="0">
-              <a:solidFill>
-                <a:srgbClr val="263044"/>
-              </a:solidFill>
-            </a:endParaRPr>
+            <a:r>
+              <a:rPr b="0">
+                <a:solidFill>
+                  <a:srgbClr val="263044"/>
+                </a:solidFill>
+              </a:rPr>
+              <a:t>    </a:t>
+            </a:r>
+            <a:r>
+              <a:rPr b="0">
+                <a:solidFill>
+                  <a:srgbClr val="7651D4"/>
+                </a:solidFill>
+              </a:rPr>
+              <a:t>Assert</a:t>
+            </a:r>
+            <a:r>
+              <a:rPr b="0">
+                <a:solidFill>
+                  <a:srgbClr val="263044"/>
+                </a:solidFill>
+              </a:rPr>
+              <a:t>.</a:t>
+            </a:r>
+            <a:r>
+              <a:rPr b="0">
+                <a:solidFill>
+                  <a:srgbClr val="7651D4"/>
+                </a:solidFill>
+              </a:rPr>
+              <a:t>That</a:t>
+            </a:r>
+            <a:r>
+              <a:rPr b="0">
+                <a:solidFill>
+                  <a:srgbClr val="263044"/>
+                </a:solidFill>
+              </a:rPr>
+              <a:t>(decision, </a:t>
+            </a:r>
+            <a:r>
+              <a:rPr b="0">
+                <a:solidFill>
+                  <a:srgbClr val="7651D4"/>
+                </a:solidFill>
+              </a:rPr>
+              <a:t>Is</a:t>
+            </a:r>
+            <a:r>
+              <a:rPr b="0">
+                <a:solidFill>
+                  <a:srgbClr val="263044"/>
+                </a:solidFill>
+              </a:rPr>
+              <a:t>.</a:t>
+            </a:r>
+            <a:r>
+              <a:rPr b="0">
+                <a:solidFill>
+                  <a:srgbClr val="7651D4"/>
+                </a:solidFill>
+              </a:rPr>
+              <a:t>EqualTo</a:t>
+            </a:r>
+            <a:r>
+              <a:rPr b="0">
+                <a:solidFill>
+                  <a:srgbClr val="263044"/>
+                </a:solidFill>
+              </a:rPr>
+              <a:t>(</a:t>
+            </a:r>
           </a:p>
           <a:p xmlns:a="http://schemas.openxmlformats.org/drawingml/2006/main">
             <a:pPr>
+              <a:lnSpc>
+                <a:spcPts val="1300"/>
+              </a:lnSpc>
               <a:buNone/>
               <a:defRPr sz="1050">
                 <a:solidFill>
@@ -10092,7 +10456,7 @@
                   <a:srgbClr val="263044"/>
                 </a:solidFill>
               </a:rPr>
-              <a:t>    </a:t>
+              <a:t>        </a:t>
             </a:r>
             <a:r>
               <a:rPr b="1">
@@ -10100,7 +10464,7 @@
                   <a:srgbClr val="0969C3"/>
                 </a:solidFill>
               </a:rPr>
-              <a:t>var</a:t>
+              <a:t>new</a:t>
             </a:r>
             <a:r>
               <a:rPr b="0">
@@ -10108,7 +10472,7 @@
                   <a:srgbClr val="263044"/>
                 </a:solidFill>
               </a:rPr>
-              <a:t> result = service.</a:t>
+              <a:t> </a:t>
             </a:r>
             <a:r>
               <a:rPr b="0">
@@ -10116,7 +10480,7 @@
                   <a:srgbClr val="7651D4"/>
                 </a:solidFill>
               </a:rPr>
-              <a:t>Read</a:t>
+              <a:t>ResourceAccessDecision</a:t>
             </a:r>
             <a:r>
               <a:rPr b="0">
@@ -10124,7 +10488,7 @@
                   <a:srgbClr val="263044"/>
                 </a:solidFill>
               </a:rPr>
-              <a:t>(user, </a:t>
+              <a:t>(</a:t>
             </a:r>
             <a:r>
               <a:rPr b="1">
@@ -10132,7 +10496,7 @@
                   <a:srgbClr val="0969C3"/>
                 </a:solidFill>
               </a:rPr>
-              <a:t>record</a:t>
+              <a:t>false</a:t>
             </a:r>
             <a:r>
               <a:rPr b="0">
@@ -10140,231 +10504,46 @@
                   <a:srgbClr val="263044"/>
                 </a:solidFill>
               </a:rPr>
-              <a:t>);</a:t>
+              <a:t>, </a:t>
+            </a:r>
+            <a:r>
+              <a:rPr b="0">
+                <a:solidFill>
+                  <a:srgbClr val="7651D4"/>
+                </a:solidFill>
+              </a:rPr>
+              <a:t>ResourceAccessCodes</a:t>
+            </a:r>
+            <a:r>
+              <a:rPr b="0">
+                <a:solidFill>
+                  <a:srgbClr val="263044"/>
+                </a:solidFill>
+              </a:rPr>
+              <a:t>.</a:t>
+            </a:r>
+            <a:r>
+              <a:rPr b="0">
+                <a:solidFill>
+                  <a:srgbClr val="7651D4"/>
+                </a:solidFill>
+              </a:rPr>
+              <a:t>NotOwner</a:t>
+            </a:r>
+            <a:r>
+              <a:rPr b="0">
+                <a:solidFill>
+                  <a:srgbClr val="263044"/>
+                </a:solidFill>
+              </a:rPr>
+              <a:t>)));</a:t>
             </a:r>
           </a:p>
           <a:p xmlns:a="http://schemas.openxmlformats.org/drawingml/2006/main">
             <a:pPr>
-              <a:buNone/>
-              <a:defRPr sz="1050">
-                <a:solidFill>
-                  <a:srgbClr val="263044"/>
-                </a:solidFill>
-                <a:latin typeface="Consolas"/>
-                <a:ea typeface="Consolas"/>
-                <a:cs typeface="Consolas"/>
-              </a:defRPr>
-            </a:pPr>
-            <a:endParaRPr b="0">
-              <a:solidFill>
-                <a:srgbClr val="263044"/>
-              </a:solidFill>
-            </a:endParaRPr>
-          </a:p>
-          <a:p xmlns:a="http://schemas.openxmlformats.org/drawingml/2006/main">
-            <a:pPr>
-              <a:buNone/>
-              <a:defRPr sz="1050">
-                <a:solidFill>
-                  <a:srgbClr val="263044"/>
-                </a:solidFill>
-                <a:latin typeface="Consolas"/>
-                <a:ea typeface="Consolas"/>
-                <a:cs typeface="Consolas"/>
-              </a:defRPr>
-            </a:pPr>
-            <a:r>
-              <a:rPr b="0">
-                <a:solidFill>
-                  <a:srgbClr val="263044"/>
-                </a:solidFill>
-              </a:rPr>
-              <a:t>    result.</a:t>
-            </a:r>
-            <a:r>
-              <a:rPr b="0">
-                <a:solidFill>
-                  <a:srgbClr val="7651D4"/>
-                </a:solidFill>
-              </a:rPr>
-              <a:t>Status</a:t>
-            </a:r>
-            <a:r>
-              <a:rPr b="0">
-                <a:solidFill>
-                  <a:srgbClr val="263044"/>
-                </a:solidFill>
-              </a:rPr>
-              <a:t>.</a:t>
-            </a:r>
-            <a:r>
-              <a:rPr b="0">
-                <a:solidFill>
-                  <a:srgbClr val="7651D4"/>
-                </a:solidFill>
-              </a:rPr>
-              <a:t>Should</a:t>
-            </a:r>
-            <a:r>
-              <a:rPr b="0">
-                <a:solidFill>
-                  <a:srgbClr val="263044"/>
-                </a:solidFill>
-              </a:rPr>
-              <a:t>().</a:t>
-            </a:r>
-            <a:r>
-              <a:rPr b="0">
-                <a:solidFill>
-                  <a:srgbClr val="7651D4"/>
-                </a:solidFill>
-              </a:rPr>
-              <a:t>Be</a:t>
-            </a:r>
-            <a:r>
-              <a:rPr b="0">
-                <a:solidFill>
-                  <a:srgbClr val="263044"/>
-                </a:solidFill>
-              </a:rPr>
-              <a:t>(</a:t>
-            </a:r>
-            <a:r>
-              <a:rPr b="0">
-                <a:solidFill>
-                  <a:srgbClr val="7651D4"/>
-                </a:solidFill>
-              </a:rPr>
-              <a:t>Status</a:t>
-            </a:r>
-            <a:r>
-              <a:rPr b="0">
-                <a:solidFill>
-                  <a:srgbClr val="263044"/>
-                </a:solidFill>
-              </a:rPr>
-              <a:t>.</a:t>
-            </a:r>
-            <a:r>
-              <a:rPr b="0">
-                <a:solidFill>
-                  <a:srgbClr val="7651D4"/>
-                </a:solidFill>
-              </a:rPr>
-              <a:t>NotFound</a:t>
-            </a:r>
-            <a:r>
-              <a:rPr b="0">
-                <a:solidFill>
-                  <a:srgbClr val="263044"/>
-                </a:solidFill>
-              </a:rPr>
-              <a:t>);</a:t>
-            </a:r>
-          </a:p>
-          <a:p xmlns:a="http://schemas.openxmlformats.org/drawingml/2006/main">
-            <a:pPr>
-              <a:buNone/>
-              <a:defRPr sz="1050">
-                <a:solidFill>
-                  <a:srgbClr val="263044"/>
-                </a:solidFill>
-                <a:latin typeface="Consolas"/>
-                <a:ea typeface="Consolas"/>
-                <a:cs typeface="Consolas"/>
-              </a:defRPr>
-            </a:pPr>
-            <a:r>
-              <a:rPr b="0">
-                <a:solidFill>
-                  <a:srgbClr val="263044"/>
-                </a:solidFill>
-              </a:rPr>
-              <a:t>    audit.</a:t>
-            </a:r>
-            <a:r>
-              <a:rPr b="0">
-                <a:solidFill>
-                  <a:srgbClr val="7651D4"/>
-                </a:solidFill>
-              </a:rPr>
-              <a:t>Last</a:t>
-            </a:r>
-            <a:r>
-              <a:rPr b="0">
-                <a:solidFill>
-                  <a:srgbClr val="263044"/>
-                </a:solidFill>
-              </a:rPr>
-              <a:t>.</a:t>
-            </a:r>
-            <a:r>
-              <a:rPr b="0">
-                <a:solidFill>
-                  <a:srgbClr val="7651D4"/>
-                </a:solidFill>
-              </a:rPr>
-              <a:t>Outcome</a:t>
-            </a:r>
-            <a:r>
-              <a:rPr b="0">
-                <a:solidFill>
-                  <a:srgbClr val="263044"/>
-                </a:solidFill>
-              </a:rPr>
-              <a:t>.</a:t>
-            </a:r>
-            <a:r>
-              <a:rPr b="0">
-                <a:solidFill>
-                  <a:srgbClr val="7651D4"/>
-                </a:solidFill>
-              </a:rPr>
-              <a:t>Should</a:t>
-            </a:r>
-            <a:r>
-              <a:rPr b="0">
-                <a:solidFill>
-                  <a:srgbClr val="263044"/>
-                </a:solidFill>
-              </a:rPr>
-              <a:t>().</a:t>
-            </a:r>
-            <a:r>
-              <a:rPr b="0">
-                <a:solidFill>
-                  <a:srgbClr val="7651D4"/>
-                </a:solidFill>
-              </a:rPr>
-              <a:t>Be</a:t>
-            </a:r>
-            <a:r>
-              <a:rPr b="0">
-                <a:solidFill>
-                  <a:srgbClr val="263044"/>
-                </a:solidFill>
-              </a:rPr>
-              <a:t>(</a:t>
-            </a:r>
-            <a:r>
-              <a:rPr b="0">
-                <a:solidFill>
-                  <a:srgbClr val="B45309"/>
-                </a:solidFill>
-              </a:rPr>
-              <a:t>"denied"</a:t>
-            </a:r>
-            <a:r>
-              <a:rPr b="0">
-                <a:solidFill>
-                  <a:srgbClr val="263044"/>
-                </a:solidFill>
-              </a:rPr>
-              <a:t>);</a:t>
-            </a:r>
-          </a:p>
-          <a:p xmlns:a="http://schemas.openxmlformats.org/drawingml/2006/main">
-            <a:pPr>
+              <a:lnSpc>
+                <a:spcPts val="1300"/>
+              </a:lnSpc>
               <a:buNone/>
               <a:defRPr sz="1050">
                 <a:solidFill>
@@ -11205,7 +11384,7 @@
           <a:p xmlns:a="http://schemas.openxmlformats.org/drawingml/2006/main">
             <a:pPr algn="r">
               <a:lnSpc>
-                <a:spcPct val="100000"/>
+                <a:spcPts val="1300"/>
               </a:lnSpc>
               <a:buNone/>
               <a:defRPr sz="1050" b="0">
@@ -11232,7 +11411,7 @@
           <a:p xmlns:a="http://schemas.openxmlformats.org/drawingml/2006/main">
             <a:pPr algn="r">
               <a:lnSpc>
-                <a:spcPct val="100000"/>
+                <a:spcPts val="1300"/>
               </a:lnSpc>
               <a:buNone/>
               <a:defRPr sz="1050" b="0">
@@ -11259,7 +11438,7 @@
           <a:p xmlns:a="http://schemas.openxmlformats.org/drawingml/2006/main">
             <a:pPr algn="r">
               <a:lnSpc>
-                <a:spcPct val="100000"/>
+                <a:spcPts val="1300"/>
               </a:lnSpc>
               <a:buNone/>
               <a:defRPr sz="1050" b="0">
@@ -11286,7 +11465,7 @@
           <a:p xmlns:a="http://schemas.openxmlformats.org/drawingml/2006/main">
             <a:pPr algn="r">
               <a:lnSpc>
-                <a:spcPct val="100000"/>
+                <a:spcPts val="1300"/>
               </a:lnSpc>
               <a:buNone/>
               <a:defRPr sz="1050" b="0">
@@ -11313,7 +11492,7 @@
           <a:p xmlns:a="http://schemas.openxmlformats.org/drawingml/2006/main">
             <a:pPr algn="r">
               <a:lnSpc>
-                <a:spcPct val="100000"/>
+                <a:spcPts val="1300"/>
               </a:lnSpc>
               <a:buNone/>
               <a:defRPr sz="1050" b="0">
@@ -11340,7 +11519,7 @@
           <a:p xmlns:a="http://schemas.openxmlformats.org/drawingml/2006/main">
             <a:pPr algn="r">
               <a:lnSpc>
-                <a:spcPct val="100000"/>
+                <a:spcPts val="1300"/>
               </a:lnSpc>
               <a:buNone/>
               <a:defRPr sz="1050" b="0">
@@ -11367,7 +11546,7 @@
           <a:p xmlns:a="http://schemas.openxmlformats.org/drawingml/2006/main">
             <a:pPr algn="r">
               <a:lnSpc>
-                <a:spcPct val="100000"/>
+                <a:spcPts val="1300"/>
               </a:lnSpc>
               <a:buNone/>
               <a:defRPr sz="1050" b="0">
@@ -11394,7 +11573,7 @@
           <a:p xmlns:a="http://schemas.openxmlformats.org/drawingml/2006/main">
             <a:pPr algn="r">
               <a:lnSpc>
-                <a:spcPct val="100000"/>
+                <a:spcPts val="1300"/>
               </a:lnSpc>
               <a:buNone/>
               <a:defRPr sz="1050" b="0">
@@ -11454,6 +11633,9 @@
           <a:lstStyle xmlns:a="http://schemas.openxmlformats.org/drawingml/2006/main"/>
           <a:p xmlns:a="http://schemas.openxmlformats.org/drawingml/2006/main">
             <a:pPr>
+              <a:lnSpc>
+                <a:spcPts val="1300"/>
+              </a:lnSpc>
               <a:buNone/>
               <a:defRPr sz="1125">
                 <a:solidFill>
@@ -11475,6 +11657,9 @@
           </a:p>
           <a:p xmlns:a="http://schemas.openxmlformats.org/drawingml/2006/main">
             <a:pPr>
+              <a:lnSpc>
+                <a:spcPts val="1300"/>
+              </a:lnSpc>
               <a:buNone/>
               <a:defRPr sz="1125">
                 <a:solidFill>
@@ -11528,6 +11713,9 @@
           </a:p>
           <a:p xmlns:a="http://schemas.openxmlformats.org/drawingml/2006/main">
             <a:pPr>
+              <a:lnSpc>
+                <a:spcPts val="1300"/>
+              </a:lnSpc>
               <a:buNone/>
               <a:defRPr sz="1125">
                 <a:solidFill>
@@ -11581,6 +11769,9 @@
           </a:p>
           <a:p xmlns:a="http://schemas.openxmlformats.org/drawingml/2006/main">
             <a:pPr>
+              <a:lnSpc>
+                <a:spcPts val="1300"/>
+              </a:lnSpc>
               <a:buNone/>
               <a:defRPr sz="1125">
                 <a:solidFill>
@@ -11634,6 +11825,9 @@
           </a:p>
           <a:p xmlns:a="http://schemas.openxmlformats.org/drawingml/2006/main">
             <a:pPr>
+              <a:lnSpc>
+                <a:spcPts val="1300"/>
+              </a:lnSpc>
               <a:buNone/>
               <a:defRPr sz="1125">
                 <a:solidFill>
@@ -11687,6 +11881,9 @@
           </a:p>
           <a:p xmlns:a="http://schemas.openxmlformats.org/drawingml/2006/main">
             <a:pPr>
+              <a:lnSpc>
+                <a:spcPts val="1300"/>
+              </a:lnSpc>
               <a:buNone/>
               <a:defRPr sz="1125">
                 <a:solidFill>
@@ -11740,6 +11937,9 @@
           </a:p>
           <a:p xmlns:a="http://schemas.openxmlformats.org/drawingml/2006/main">
             <a:pPr>
+              <a:lnSpc>
+                <a:spcPts val="1300"/>
+              </a:lnSpc>
               <a:buNone/>
               <a:defRPr sz="1125">
                 <a:solidFill>
@@ -11785,6 +11985,9 @@
           </a:p>
           <a:p xmlns:a="http://schemas.openxmlformats.org/drawingml/2006/main">
             <a:pPr>
+              <a:lnSpc>
+                <a:spcPts val="1300"/>
+              </a:lnSpc>
               <a:buNone/>
               <a:defRPr sz="1125">
                 <a:solidFill>
@@ -21285,7 +21488,7 @@
                 <a:ea typeface="Aptos"/>
                 <a:cs typeface="Aptos"/>
               </a:rPr>
-              <a:t>Провера права укључује субјект, радњу, ресурс и његову припадност.</a:t>
+              <a:t>Субјекат је потврђен идентитет са скупом дозвола; одлука полази од њега, а не од података из захтева.</a:t>
             </a:r>
           </a:p>
         </p:txBody>
@@ -21509,7 +21712,7 @@
                 <a:ea typeface="Aptos"/>
                 <a:cs typeface="Aptos"/>
               </a:rPr>
-              <a:t>Одлука укључује идентитет, тражену радњу, ресурс и припадност ресурса одговарајућем домену или власнику.</a:t>
+              <a:t>Дозвола за читање својих записа не укључује туђе; шири приступ је посебна, именована дозвола.</a:t>
             </a:r>
           </a:p>
         </p:txBody>
@@ -21733,7 +21936,7 @@
                 <a:ea typeface="Aptos"/>
                 <a:cs typeface="Aptos"/>
               </a:rPr>
-              <a:t>Класификација има пословно значење које сви чланови тима тумаче на исти начин.</a:t>
+              <a:t>Запис о одлуци чува ко је тражио приступ и на основу које дозволе је исход донет.</a:t>
             </a:r>
           </a:p>
         </p:txBody>
@@ -22044,7 +22247,7 @@
                 <a:ea typeface="Aptos"/>
                 <a:cs typeface="Aptos"/>
               </a:rPr>
-              <a:t>Који ресурс носи ризик хоризонталног приступа и које информације одлука мора да узме у обзир?</a:t>
+              <a:t>Које дозволе субјекат мора да има за свој запис, а које за туђи?</a:t>
             </a:r>
           </a:p>
         </p:txBody>
@@ -22513,7 +22716,7 @@
                 <a:ea typeface="Aptos"/>
                 <a:cs typeface="Aptos"/>
               </a:rPr>
-              <a:t>Одбијање не треба да открива садржај нити постојање туђег осетљивог ресурса.</a:t>
+              <a:t>Ресурс има власника и класификацију; оба податка улазе у одлуку пре читања садржаја.</a:t>
             </a:r>
           </a:p>
         </p:txBody>
@@ -22737,7 +22940,7 @@
                 <a:ea typeface="Aptos"/>
                 <a:cs typeface="Aptos"/>
               </a:rPr>
-              <a:t>Исти принцип важи за API позив, извоз података и позадинску обраду, не само за екран који корисник види.</a:t>
+              <a:t>Одбијање не треба да открива садржај нити постојање туђег осетљивог ресурса.</a:t>
             </a:r>
           </a:p>
         </p:txBody>
@@ -22961,7 +23164,7 @@
                 <a:ea typeface="Aptos"/>
                 <a:cs typeface="Aptos"/>
               </a:rPr>
-              <a:t>Правила за приказ и извоз треба да буду строжа када последице грешке расту.</a:t>
+              <a:t>Исти принцип важи за API позив, извоз података и позадинску обраду, не само за екран.</a:t>
             </a:r>
           </a:p>
         </p:txBody>
@@ -23741,7 +23944,7 @@
                 <a:ea typeface="Aptos"/>
                 <a:cs typeface="Aptos"/>
               </a:rPr>
-              <a:t>Класификација представља улаз у правила руковања подацима.</a:t>
+              <a:t>Власништво повезује субјекта и ресурс: исти захтев има различит исход за власника и за другог корисника.</a:t>
             </a:r>
           </a:p>
         </p:txBody>
@@ -23965,7 +24168,7 @@
                 <a:ea typeface="Aptos"/>
                 <a:cs typeface="Aptos"/>
               </a:rPr>
-              <a:t>Одговор на одбијени приступ треба да буде користан клијенту, али не сме да открије податке о заштићеном запису.</a:t>
+              <a:t>Класификација одређује докле сеже шира дозвола; запис са највишом ознаком остаје доступан само власнику.</a:t>
             </a:r>
           </a:p>
         </p:txBody>
@@ -24189,7 +24392,7 @@
                 <a:ea typeface="Aptos"/>
                 <a:cs typeface="Aptos"/>
               </a:rPr>
-              <a:t>Власник податка одговара за оправданост промене класификације, а систем чува траг те промене.</a:t>
+              <a:t>Власник податка одговара за промену класификације, а систем чува траг те промене.</a:t>
             </a:r>
           </a:p>
         </p:txBody>
@@ -24500,7 +24703,7 @@
                 <a:ea typeface="Aptos"/>
                 <a:cs typeface="Aptos"/>
               </a:rPr>
-              <a:t>Који ресурс носи ризик хоризонталног приступа и које информације одлука мора да узме у обзир?</a:t>
+              <a:t>Која чињеница о односу субјекта и ресурса мења исход при истој улози?</a:t>
             </a:r>
           </a:p>
         </p:txBody>
@@ -24969,7 +25172,7 @@
                 <a:ea typeface="Aptos"/>
                 <a:cs typeface="Aptos"/>
               </a:rPr>
-              <a:t>Класификација има пословно значење које сви чланови тима тумаче на исти начин.</a:t>
+              <a:t>Одлука се доноси на серверу, над конкретним записом, пре него што се садржај прочита.</a:t>
             </a:r>
           </a:p>
         </p:txBody>
@@ -25193,7 +25396,7 @@
                 <a:ea typeface="Aptos"/>
                 <a:cs typeface="Aptos"/>
               </a:rPr>
-              <a:t>Правила за приказ и извоз треба да буду строжа када последице грешке расту.</a:t>
+              <a:t>Сваки исход има стабилан код разлога, па се одбијање може тестирати и објаснити.</a:t>
             </a:r>
           </a:p>
         </p:txBody>
@@ -25417,7 +25620,7 @@
                 <a:ea typeface="Aptos"/>
                 <a:cs typeface="Aptos"/>
               </a:rPr>
-              <a:t>Власник податка одговара за оправданост промене класификације, а систем чува траг те промене.</a:t>
+              <a:t>Негативан тест за сваки разлог одбијања доказује да граница заиста постоји.</a:t>
             </a:r>
           </a:p>
         </p:txBody>
@@ -25728,7 +25931,7 @@
                 <a:ea typeface="Aptos"/>
                 <a:cs typeface="Aptos"/>
               </a:rPr>
-              <a:t>Који ресурс носи ризик хоризонталног приступа и које информације одлука мора да узме у обзир?</a:t>
+              <a:t>Који кодови исхода постоје у вашој одлуци и који тест доказује сваки од њих?</a:t>
             </a:r>
           </a:p>
         </p:txBody>
